--- a/docs/v13.2-pitch-deck.pptx
+++ b/docs/v13.2-pitch-deck.pptx
@@ -3253,7 +3253,7 @@
                 </a:solidFill>
                 <a:latin typeface="Georgia"/>
               </a:rPr>
-              <a:t>Charting Capital</a:t>
+              <a:t>Nisaba Capital Charting</a:t>
             </a:r>
           </a:p>
         </p:txBody>
@@ -5027,7 +5027,7 @@
                 </a:solidFill>
                 <a:latin typeface="Georgia"/>
               </a:rPr>
-              <a:t>Charting Capital  —  the platform play.</a:t>
+              <a:t>Nisaba Capital Charting  —  the platform play.</a:t>
             </a:r>
           </a:p>
         </p:txBody>
@@ -5090,7 +5090,7 @@
                 </a:solidFill>
                 <a:latin typeface="Calibri"/>
               </a:rPr>
-              <a:t>Pursuit Astro is the engine. </a:t>
+              <a:t>Nisaba Capital Charting is the engine. </a:t>
             </a:r>
             <a:r>
               <a:rPr sz="1600" b="1" i="0">
@@ -5099,7 +5099,7 @@
                 </a:solidFill>
                 <a:latin typeface="Calibri"/>
               </a:rPr>
-              <a:t>Charting Capital</a:t>
+              <a:t>Nisaba Capital Charting</a:t>
             </a:r>
             <a:r>
               <a:rPr sz="1600" b="0" i="0">
@@ -5319,7 +5319,7 @@
                 </a:solidFill>
                 <a:latin typeface="Calibri"/>
               </a:rPr>
-              <a:t>🎤  “Pursuit Astro is the engine. Charting Capital is the brand.” Three audiences = three monetization paths. Don’t dwell — forward-looking, not prescriptive.</a:t>
+              <a:t>🎤  “Nisaba Capital Charting is the engine. Nisaba Capital Charting is the brand.” Three audiences = three monetization paths. Don’t dwell — forward-looking, not prescriptive.</a:t>
             </a:r>
           </a:p>
         </p:txBody>
@@ -5724,7 +5724,7 @@
                 </a:solidFill>
                 <a:latin typeface="Calibri"/>
               </a:rPr>
-              <a:t>AISLING LEIVA  ·  CHARTING CAPITAL  ·  THANK YOU</a:t>
+              <a:t>AISLING LEIVA  ·  Nisaba Capital Charting  ·  THANK YOU</a:t>
             </a:r>
           </a:p>
         </p:txBody>
@@ -7034,7 +7034,7 @@
                 </a:solidFill>
                 <a:latin typeface="Georgia"/>
               </a:rPr>
-              <a:t>Charting Capital  ·  three tiers, three audiences, one engine.</a:t>
+              <a:t>Nisaba Capital Charting  ·  three tiers, three audiences, one engine.</a:t>
             </a:r>
           </a:p>
         </p:txBody>
@@ -11700,7 +11700,7 @@
                 </a:solidFill>
                 <a:latin typeface="Calibri"/>
               </a:rPr>
-              <a:t>Pursuit Astro</a:t>
+              <a:t>Nisaba Capital Charting</a:t>
             </a:r>
             <a:r>
               <a:rPr sz="1400" b="0" i="0">
